--- a/迈克尔逊干涉仪实验探究/答辩PPT.pptx
+++ b/迈克尔逊干涉仪实验探究/答辩PPT.pptx
@@ -3328,33 +3328,70 @@
           </a:effectLst>
         </p:spPr>
       </p:sp>
-      <p:pic>
-        <p:nvPicPr>
-          <p:cNvPr id="8" name="Image 0" descr="preencoded.png">    </p:cNvPr>
-          <p:cNvPicPr>
-            <a:picLocks noChangeAspect="1"/>
-          </p:cNvPicPr>
-          <p:nvPr/>
-        </p:nvPicPr>
-        <p:blipFill>
-          <a:blip r:embed="rId1"/>
-          <a:stretch>
-            <a:fillRect/>
-          </a:stretch>
-        </p:blipFill>
+      <p:sp>
+        <p:nvSpPr>
+          <p:cNvPr id="8" name="Shape 5"/>
+          <p:cNvSpPr/>
+          <p:nvPr/>
+        </p:nvSpPr>
         <p:spPr>
           <a:xfrm>
             <a:off x="914400" y="3520440"/>
             <a:ext cx="320040" cy="320040"/>
           </a:xfrm>
           <a:prstGeom prst="rect">
-            <a:avLst/>
-          </a:prstGeom>
-        </p:spPr>
-      </p:pic>
-      <p:sp>
-        <p:nvSpPr>
-          <p:cNvPr id="9" name="Text 5"/>
+            <a:avLst>
+              <a:gd name="adj" fmla="val 14286"/>
+            </a:avLst>
+          </a:prstGeom>
+          <a:solidFill>
+            <a:srgbClr val="2980B9"/>
+          </a:solidFill>
+          <a:ln/>
+        </p:spPr>
+      </p:sp>
+      <p:sp>
+        <p:nvSpPr>
+          <p:cNvPr id="9" name="Text 6"/>
+          <p:cNvSpPr/>
+          <p:nvPr/>
+        </p:nvSpPr>
+        <p:spPr>
+          <a:xfrm>
+            <a:off x="914400" y="3520440"/>
+            <a:ext cx="320040" cy="320040"/>
+          </a:xfrm>
+          <a:prstGeom prst="rect">
+            <a:avLst/>
+          </a:prstGeom>
+          <a:noFill/>
+          <a:ln/>
+        </p:spPr>
+        <p:txBody>
+          <a:bodyPr wrap="square" lIns="0" tIns="0" rIns="0" bIns="0" rtlCol="0" anchor="ctr"/>
+          <a:lstStyle/>
+          <a:p>
+            <a:pPr algn="ctr" indent="0" marL="0">
+              <a:buNone/>
+            </a:pPr>
+            <a:r>
+              <a:rPr lang="en-US" sz="980" dirty="0">
+                <a:solidFill>
+                  <a:srgbClr val="FFFFFF"/>
+                </a:solidFill>
+                <a:latin typeface="Segoe UI Symbol" pitchFamily="34" charset="0"/>
+                <a:ea typeface="Segoe UI Symbol" pitchFamily="34" charset="-122"/>
+                <a:cs typeface="Segoe UI Symbol" pitchFamily="34" charset="-120"/>
+              </a:rPr>
+              <a:t>↔</a:t>
+            </a:r>
+            <a:endParaRPr lang="en-US" sz="980" dirty="0"/>
+          </a:p>
+        </p:txBody>
+      </p:sp>
+      <p:sp>
+        <p:nvSpPr>
+          <p:cNvPr id="10" name="Text 7"/>
           <p:cNvSpPr/>
           <p:nvPr/>
         </p:nvSpPr>
@@ -3393,7 +3430,7 @@
       </p:sp>
       <p:sp>
         <p:nvSpPr>
-          <p:cNvPr id="10" name="Text 6"/>
+          <p:cNvPr id="11" name="Text 8"/>
           <p:cNvSpPr/>
           <p:nvPr/>
         </p:nvSpPr>
@@ -3464,7 +3501,7 @@
       </p:sp>
       <p:sp>
         <p:nvSpPr>
-          <p:cNvPr id="11" name="Text 7"/>
+          <p:cNvPr id="12" name="Text 9"/>
           <p:cNvSpPr/>
           <p:nvPr/>
         </p:nvSpPr>
@@ -4835,33 +4872,70 @@
           </a:effectLst>
         </p:spPr>
       </p:sp>
-      <p:pic>
-        <p:nvPicPr>
-          <p:cNvPr id="12" name="Image 0" descr="preencoded.png">    </p:cNvPr>
-          <p:cNvPicPr>
-            <a:picLocks noChangeAspect="1"/>
-          </p:cNvPicPr>
-          <p:nvPr/>
-        </p:nvPicPr>
-        <p:blipFill>
-          <a:blip r:embed="rId1"/>
-          <a:stretch>
-            <a:fillRect/>
-          </a:stretch>
-        </p:blipFill>
+      <p:sp>
+        <p:nvSpPr>
+          <p:cNvPr id="12" name="Shape 10"/>
+          <p:cNvSpPr/>
+          <p:nvPr/>
+        </p:nvSpPr>
         <p:spPr>
           <a:xfrm>
             <a:off x="914400" y="4087368"/>
             <a:ext cx="320040" cy="320040"/>
           </a:xfrm>
           <a:prstGeom prst="rect">
-            <a:avLst/>
-          </a:prstGeom>
-        </p:spPr>
-      </p:pic>
-      <p:sp>
-        <p:nvSpPr>
-          <p:cNvPr id="13" name="Text 10"/>
+            <a:avLst>
+              <a:gd name="adj" fmla="val 14286"/>
+            </a:avLst>
+          </a:prstGeom>
+          <a:solidFill>
+            <a:srgbClr val="27AE60"/>
+          </a:solidFill>
+          <a:ln/>
+        </p:spPr>
+      </p:sp>
+      <p:sp>
+        <p:nvSpPr>
+          <p:cNvPr id="13" name="Text 11"/>
+          <p:cNvSpPr/>
+          <p:nvPr/>
+        </p:nvSpPr>
+        <p:spPr>
+          <a:xfrm>
+            <a:off x="914400" y="4087368"/>
+            <a:ext cx="320040" cy="320040"/>
+          </a:xfrm>
+          <a:prstGeom prst="rect">
+            <a:avLst/>
+          </a:prstGeom>
+          <a:noFill/>
+          <a:ln/>
+        </p:spPr>
+        <p:txBody>
+          <a:bodyPr wrap="square" lIns="0" tIns="0" rIns="0" bIns="0" rtlCol="0" anchor="ctr"/>
+          <a:lstStyle/>
+          <a:p>
+            <a:pPr algn="ctr" indent="0" marL="0">
+              <a:buNone/>
+            </a:pPr>
+            <a:r>
+              <a:rPr lang="en-US" sz="980" dirty="0">
+                <a:solidFill>
+                  <a:srgbClr val="FFFFFF"/>
+                </a:solidFill>
+                <a:latin typeface="Segoe UI Symbol" pitchFamily="34" charset="0"/>
+                <a:ea typeface="Segoe UI Symbol" pitchFamily="34" charset="-122"/>
+                <a:cs typeface="Segoe UI Symbol" pitchFamily="34" charset="-120"/>
+              </a:rPr>
+              <a:t>✔</a:t>
+            </a:r>
+            <a:endParaRPr lang="en-US" sz="980" dirty="0"/>
+          </a:p>
+        </p:txBody>
+      </p:sp>
+      <p:sp>
+        <p:nvSpPr>
+          <p:cNvPr id="14" name="Text 12"/>
           <p:cNvSpPr/>
           <p:nvPr/>
         </p:nvSpPr>
@@ -4903,7 +4977,7 @@
       </p:sp>
       <p:sp>
         <p:nvSpPr>
-          <p:cNvPr id="14" name="Text 11"/>
+          <p:cNvPr id="15" name="Text 13"/>
           <p:cNvSpPr/>
           <p:nvPr/>
         </p:nvSpPr>
@@ -6708,33 +6782,70 @@
           </a:effectLst>
         </p:spPr>
       </p:sp>
-      <p:pic>
-        <p:nvPicPr>
-          <p:cNvPr id="6" name="Image 0" descr="preencoded.png">    </p:cNvPr>
-          <p:cNvPicPr>
-            <a:picLocks noChangeAspect="1"/>
-          </p:cNvPicPr>
-          <p:nvPr/>
-        </p:nvPicPr>
-        <p:blipFill>
-          <a:blip r:embed="rId1"/>
-          <a:stretch>
-            <a:fillRect/>
-          </a:stretch>
-        </p:blipFill>
+      <p:sp>
+        <p:nvSpPr>
+          <p:cNvPr id="6" name="Shape 4"/>
+          <p:cNvSpPr/>
+          <p:nvPr/>
+        </p:nvSpPr>
         <p:spPr>
           <a:xfrm>
             <a:off x="914400" y="1417320"/>
             <a:ext cx="365760" cy="365760"/>
           </a:xfrm>
           <a:prstGeom prst="rect">
-            <a:avLst/>
-          </a:prstGeom>
-        </p:spPr>
-      </p:pic>
-      <p:sp>
-        <p:nvSpPr>
-          <p:cNvPr id="7" name="Text 4"/>
+            <a:avLst>
+              <a:gd name="adj" fmla="val 12500"/>
+            </a:avLst>
+          </a:prstGeom>
+          <a:solidFill>
+            <a:srgbClr val="2980B9"/>
+          </a:solidFill>
+          <a:ln/>
+        </p:spPr>
+      </p:sp>
+      <p:sp>
+        <p:nvSpPr>
+          <p:cNvPr id="7" name="Text 5"/>
+          <p:cNvSpPr/>
+          <p:nvPr/>
+        </p:nvSpPr>
+        <p:spPr>
+          <a:xfrm>
+            <a:off x="914400" y="1417320"/>
+            <a:ext cx="365760" cy="365760"/>
+          </a:xfrm>
+          <a:prstGeom prst="rect">
+            <a:avLst/>
+          </a:prstGeom>
+          <a:noFill/>
+          <a:ln/>
+        </p:spPr>
+        <p:txBody>
+          <a:bodyPr wrap="square" lIns="0" tIns="0" rIns="0" bIns="0" rtlCol="0" anchor="ctr"/>
+          <a:lstStyle/>
+          <a:p>
+            <a:pPr algn="ctr" indent="0" marL="0">
+              <a:buNone/>
+            </a:pPr>
+            <a:r>
+              <a:rPr lang="en-US" sz="1120" dirty="0">
+                <a:solidFill>
+                  <a:srgbClr val="FFFFFF"/>
+                </a:solidFill>
+                <a:latin typeface="Segoe UI Symbol" pitchFamily="34" charset="0"/>
+                <a:ea typeface="Segoe UI Symbol" pitchFamily="34" charset="-122"/>
+                <a:cs typeface="Segoe UI Symbol" pitchFamily="34" charset="-120"/>
+              </a:rPr>
+              <a:t>🔍</a:t>
+            </a:r>
+            <a:endParaRPr lang="en-US" sz="1120" dirty="0"/>
+          </a:p>
+        </p:txBody>
+      </p:sp>
+      <p:sp>
+        <p:nvSpPr>
+          <p:cNvPr id="8" name="Text 6"/>
           <p:cNvSpPr/>
           <p:nvPr/>
         </p:nvSpPr>
@@ -6773,7 +6884,7 @@
       </p:sp>
       <p:sp>
         <p:nvSpPr>
-          <p:cNvPr id="8" name="Text 5"/>
+          <p:cNvPr id="9" name="Text 7"/>
           <p:cNvSpPr/>
           <p:nvPr/>
         </p:nvSpPr>
@@ -6844,7 +6955,7 @@
       </p:sp>
       <p:sp>
         <p:nvSpPr>
-          <p:cNvPr id="9" name="Shape 6"/>
+          <p:cNvPr id="10" name="Shape 8"/>
           <p:cNvSpPr/>
           <p:nvPr/>
         </p:nvSpPr>
@@ -6869,33 +6980,70 @@
           </a:effectLst>
         </p:spPr>
       </p:sp>
-      <p:pic>
-        <p:nvPicPr>
-          <p:cNvPr id="10" name="Image 1" descr="preencoded.png">    </p:cNvPr>
-          <p:cNvPicPr>
-            <a:picLocks noChangeAspect="1"/>
-          </p:cNvPicPr>
-          <p:nvPr/>
-        </p:nvPicPr>
-        <p:blipFill>
-          <a:blip r:embed="rId2"/>
-          <a:stretch>
-            <a:fillRect/>
-          </a:stretch>
-        </p:blipFill>
+      <p:sp>
+        <p:nvSpPr>
+          <p:cNvPr id="11" name="Shape 9"/>
+          <p:cNvSpPr/>
+          <p:nvPr/>
+        </p:nvSpPr>
         <p:spPr>
           <a:xfrm>
             <a:off x="5120640" y="1417320"/>
             <a:ext cx="365760" cy="365760"/>
           </a:xfrm>
           <a:prstGeom prst="rect">
-            <a:avLst/>
-          </a:prstGeom>
-        </p:spPr>
-      </p:pic>
-      <p:sp>
-        <p:nvSpPr>
-          <p:cNvPr id="11" name="Text 7"/>
+            <a:avLst>
+              <a:gd name="adj" fmla="val 12500"/>
+            </a:avLst>
+          </a:prstGeom>
+          <a:solidFill>
+            <a:srgbClr val="CC2233"/>
+          </a:solidFill>
+          <a:ln/>
+        </p:spPr>
+      </p:sp>
+      <p:sp>
+        <p:nvSpPr>
+          <p:cNvPr id="12" name="Text 10"/>
+          <p:cNvSpPr/>
+          <p:nvPr/>
+        </p:nvSpPr>
+        <p:spPr>
+          <a:xfrm>
+            <a:off x="5120640" y="1417320"/>
+            <a:ext cx="365760" cy="365760"/>
+          </a:xfrm>
+          <a:prstGeom prst="rect">
+            <a:avLst/>
+          </a:prstGeom>
+          <a:noFill/>
+          <a:ln/>
+        </p:spPr>
+        <p:txBody>
+          <a:bodyPr wrap="square" lIns="0" tIns="0" rIns="0" bIns="0" rtlCol="0" anchor="ctr"/>
+          <a:lstStyle/>
+          <a:p>
+            <a:pPr algn="ctr" indent="0" marL="0">
+              <a:buNone/>
+            </a:pPr>
+            <a:r>
+              <a:rPr lang="en-US" sz="1120" dirty="0">
+                <a:solidFill>
+                  <a:srgbClr val="FFFFFF"/>
+                </a:solidFill>
+                <a:latin typeface="Segoe UI Symbol" pitchFamily="34" charset="0"/>
+                <a:ea typeface="Segoe UI Symbol" pitchFamily="34" charset="-122"/>
+                <a:cs typeface="Segoe UI Symbol" pitchFamily="34" charset="-120"/>
+              </a:rPr>
+              <a:t>🎯</a:t>
+            </a:r>
+            <a:endParaRPr lang="en-US" sz="1120" dirty="0"/>
+          </a:p>
+        </p:txBody>
+      </p:sp>
+      <p:sp>
+        <p:nvSpPr>
+          <p:cNvPr id="13" name="Text 11"/>
           <p:cNvSpPr/>
           <p:nvPr/>
         </p:nvSpPr>
@@ -6934,7 +7082,7 @@
       </p:sp>
       <p:sp>
         <p:nvSpPr>
-          <p:cNvPr id="12" name="Text 8"/>
+          <p:cNvPr id="14" name="Text 12"/>
           <p:cNvSpPr/>
           <p:nvPr/>
         </p:nvSpPr>
@@ -7039,7 +7187,7 @@
       </p:sp>
       <p:sp>
         <p:nvSpPr>
-          <p:cNvPr id="13" name="Text 9"/>
+          <p:cNvPr id="15" name="Text 13"/>
           <p:cNvSpPr/>
           <p:nvPr/>
         </p:nvSpPr>
@@ -7214,33 +7362,70 @@
           </a:effectLst>
         </p:spPr>
       </p:sp>
-      <p:pic>
-        <p:nvPicPr>
-          <p:cNvPr id="6" name="Image 0" descr="preencoded.png">    </p:cNvPr>
-          <p:cNvPicPr>
-            <a:picLocks noChangeAspect="1"/>
-          </p:cNvPicPr>
-          <p:nvPr/>
-        </p:nvPicPr>
-        <p:blipFill>
-          <a:blip r:embed="rId1"/>
-          <a:stretch>
-            <a:fillRect/>
-          </a:stretch>
-        </p:blipFill>
+      <p:sp>
+        <p:nvSpPr>
+          <p:cNvPr id="6" name="Shape 4"/>
+          <p:cNvSpPr/>
+          <p:nvPr/>
+        </p:nvSpPr>
         <p:spPr>
           <a:xfrm>
             <a:off x="914400" y="1417320"/>
             <a:ext cx="365760" cy="365760"/>
           </a:xfrm>
           <a:prstGeom prst="rect">
-            <a:avLst/>
-          </a:prstGeom>
-        </p:spPr>
-      </p:pic>
-      <p:sp>
-        <p:nvSpPr>
-          <p:cNvPr id="7" name="Text 4"/>
+            <a:avLst>
+              <a:gd name="adj" fmla="val 12500"/>
+            </a:avLst>
+          </a:prstGeom>
+          <a:solidFill>
+            <a:srgbClr val="1B3A5C"/>
+          </a:solidFill>
+          <a:ln/>
+        </p:spPr>
+      </p:sp>
+      <p:sp>
+        <p:nvSpPr>
+          <p:cNvPr id="7" name="Text 5"/>
+          <p:cNvSpPr/>
+          <p:nvPr/>
+        </p:nvSpPr>
+        <p:spPr>
+          <a:xfrm>
+            <a:off x="914400" y="1417320"/>
+            <a:ext cx="365760" cy="365760"/>
+          </a:xfrm>
+          <a:prstGeom prst="rect">
+            <a:avLst/>
+          </a:prstGeom>
+          <a:noFill/>
+          <a:ln/>
+        </p:spPr>
+        <p:txBody>
+          <a:bodyPr wrap="square" lIns="0" tIns="0" rIns="0" bIns="0" rtlCol="0" anchor="ctr"/>
+          <a:lstStyle/>
+          <a:p>
+            <a:pPr algn="ctr" indent="0" marL="0">
+              <a:buNone/>
+            </a:pPr>
+            <a:r>
+              <a:rPr lang="en-US" sz="1120" dirty="0">
+                <a:solidFill>
+                  <a:srgbClr val="FFFFFF"/>
+                </a:solidFill>
+                <a:latin typeface="Segoe UI Symbol" pitchFamily="34" charset="0"/>
+                <a:ea typeface="Segoe UI Symbol" pitchFamily="34" charset="-122"/>
+                <a:cs typeface="Segoe UI Symbol" pitchFamily="34" charset="-120"/>
+              </a:rPr>
+              <a:t>⚙</a:t>
+            </a:r>
+            <a:endParaRPr lang="en-US" sz="1120" dirty="0"/>
+          </a:p>
+        </p:txBody>
+      </p:sp>
+      <p:sp>
+        <p:nvSpPr>
+          <p:cNvPr id="8" name="Text 6"/>
           <p:cNvSpPr/>
           <p:nvPr/>
         </p:nvSpPr>
@@ -7279,7 +7464,7 @@
       </p:sp>
       <p:sp>
         <p:nvSpPr>
-          <p:cNvPr id="8" name="Text 5"/>
+          <p:cNvPr id="9" name="Text 7"/>
           <p:cNvSpPr/>
           <p:nvPr/>
         </p:nvSpPr>
@@ -7441,7 +7626,7 @@
       </p:sp>
       <p:sp>
         <p:nvSpPr>
-          <p:cNvPr id="9" name="Shape 6"/>
+          <p:cNvPr id="10" name="Shape 8"/>
           <p:cNvSpPr/>
           <p:nvPr/>
         </p:nvSpPr>
@@ -7468,7 +7653,7 @@
       </p:sp>
       <p:sp>
         <p:nvSpPr>
-          <p:cNvPr id="10" name="Text 7"/>
+          <p:cNvPr id="11" name="Text 9"/>
           <p:cNvSpPr/>
           <p:nvPr/>
         </p:nvSpPr>
@@ -7507,7 +7692,7 @@
       </p:sp>
       <p:sp>
         <p:nvSpPr>
-          <p:cNvPr id="11" name="Shape 8"/>
+          <p:cNvPr id="12" name="Shape 10"/>
           <p:cNvSpPr/>
           <p:nvPr/>
         </p:nvSpPr>
@@ -7529,7 +7714,7 @@
       </p:sp>
       <p:sp>
         <p:nvSpPr>
-          <p:cNvPr id="12" name="Text 9"/>
+          <p:cNvPr id="13" name="Text 11"/>
           <p:cNvSpPr/>
           <p:nvPr/>
         </p:nvSpPr>
@@ -7568,7 +7753,7 @@
       </p:sp>
       <p:sp>
         <p:nvSpPr>
-          <p:cNvPr id="13" name="Shape 10"/>
+          <p:cNvPr id="14" name="Shape 12"/>
           <p:cNvSpPr/>
           <p:nvPr/>
         </p:nvSpPr>
@@ -7588,7 +7773,7 @@
       </p:sp>
       <p:sp>
         <p:nvSpPr>
-          <p:cNvPr id="14" name="Text 11"/>
+          <p:cNvPr id="15" name="Text 13"/>
           <p:cNvSpPr/>
           <p:nvPr/>
         </p:nvSpPr>
@@ -7627,7 +7812,7 @@
       </p:sp>
       <p:sp>
         <p:nvSpPr>
-          <p:cNvPr id="15" name="Shape 12"/>
+          <p:cNvPr id="16" name="Shape 14"/>
           <p:cNvSpPr/>
           <p:nvPr/>
         </p:nvSpPr>
@@ -7647,7 +7832,7 @@
       </p:sp>
       <p:sp>
         <p:nvSpPr>
-          <p:cNvPr id="16" name="Text 13"/>
+          <p:cNvPr id="17" name="Text 15"/>
           <p:cNvSpPr/>
           <p:nvPr/>
         </p:nvSpPr>
@@ -7686,17 +7871,19 @@
       </p:sp>
       <p:sp>
         <p:nvSpPr>
-          <p:cNvPr id="17" name="Shape 14"/>
-          <p:cNvSpPr/>
-          <p:nvPr/>
-        </p:nvSpPr>
-        <p:spPr>
-          <a:xfrm>
-            <a:off x="5303520" y="2468880"/>
-            <a:ext cx="777240" cy="320040"/>
-          </a:xfrm>
-          <a:prstGeom prst="rect">
-            <a:avLst/>
+          <p:cNvPr id="18" name="Shape 16"/>
+          <p:cNvSpPr/>
+          <p:nvPr/>
+        </p:nvSpPr>
+        <p:spPr>
+          <a:xfrm>
+            <a:off x="6080760" y="2468880"/>
+            <a:ext cx="640080" cy="502920"/>
+          </a:xfrm>
+          <a:prstGeom prst="rect">
+            <a:avLst>
+              <a:gd name="adj" fmla="val 9091"/>
+            </a:avLst>
           </a:prstGeom>
           <a:solidFill>
             <a:srgbClr val="CC2233"/>
@@ -7706,14 +7893,14 @@
       </p:sp>
       <p:sp>
         <p:nvSpPr>
-          <p:cNvPr id="18" name="Text 15"/>
-          <p:cNvSpPr/>
-          <p:nvPr/>
-        </p:nvSpPr>
-        <p:spPr>
-          <a:xfrm>
-            <a:off x="5303520" y="2468880"/>
-            <a:ext cx="777240" cy="320040"/>
+          <p:cNvPr id="19" name="Text 17"/>
+          <p:cNvSpPr/>
+          <p:nvPr/>
+        </p:nvSpPr>
+        <p:spPr>
+          <a:xfrm>
+            <a:off x="6080760" y="2468880"/>
+            <a:ext cx="640080" cy="502920"/>
           </a:xfrm>
           <a:prstGeom prst="rect">
             <a:avLst/>
@@ -7737,25 +7924,44 @@
                 <a:ea typeface="Calibri" pitchFamily="34" charset="-122"/>
                 <a:cs typeface="Calibri" pitchFamily="34" charset="-120"/>
               </a:rPr>
-              <a:t>M₁ 可动镜</a:t>
+              <a:t>M₁</a:t>
             </a:r>
             <a:endParaRPr lang="en-US" sz="800" dirty="0"/>
           </a:p>
-        </p:txBody>
-      </p:sp>
-      <p:sp>
-        <p:nvSpPr>
-          <p:cNvPr id="19" name="Shape 16"/>
-          <p:cNvSpPr/>
-          <p:nvPr/>
-        </p:nvSpPr>
-        <p:spPr>
-          <a:xfrm>
-            <a:off x="7406640" y="2286000"/>
-            <a:ext cx="777240" cy="320040"/>
-          </a:xfrm>
-          <a:prstGeom prst="rect">
-            <a:avLst/>
+          <a:p>
+            <a:pPr algn="ctr" indent="0" marL="0">
+              <a:buNone/>
+            </a:pPr>
+            <a:r>
+              <a:rPr lang="en-US" sz="800" dirty="0">
+                <a:solidFill>
+                  <a:srgbClr val="FFFFFF"/>
+                </a:solidFill>
+                <a:latin typeface="Calibri" pitchFamily="34" charset="0"/>
+                <a:ea typeface="Calibri" pitchFamily="34" charset="-122"/>
+                <a:cs typeface="Calibri" pitchFamily="34" charset="-120"/>
+              </a:rPr>
+              <a:t>(动镜)</a:t>
+            </a:r>
+            <a:endParaRPr lang="en-US" sz="800" dirty="0"/>
+          </a:p>
+        </p:txBody>
+      </p:sp>
+      <p:sp>
+        <p:nvSpPr>
+          <p:cNvPr id="20" name="Shape 18"/>
+          <p:cNvSpPr/>
+          <p:nvPr/>
+        </p:nvSpPr>
+        <p:spPr>
+          <a:xfrm>
+            <a:off x="7132320" y="2468880"/>
+            <a:ext cx="640080" cy="502920"/>
+          </a:xfrm>
+          <a:prstGeom prst="rect">
+            <a:avLst>
+              <a:gd name="adj" fmla="val 9091"/>
+            </a:avLst>
           </a:prstGeom>
           <a:solidFill>
             <a:srgbClr val="2980B9"/>
@@ -7765,14 +7971,14 @@
       </p:sp>
       <p:sp>
         <p:nvSpPr>
-          <p:cNvPr id="20" name="Text 17"/>
-          <p:cNvSpPr/>
-          <p:nvPr/>
-        </p:nvSpPr>
-        <p:spPr>
-          <a:xfrm>
-            <a:off x="7406640" y="2286000"/>
-            <a:ext cx="777240" cy="320040"/>
+          <p:cNvPr id="21" name="Text 19"/>
+          <p:cNvSpPr/>
+          <p:nvPr/>
+        </p:nvSpPr>
+        <p:spPr>
+          <a:xfrm>
+            <a:off x="7132320" y="2468880"/>
+            <a:ext cx="640080" cy="502920"/>
           </a:xfrm>
           <a:prstGeom prst="rect">
             <a:avLst/>
@@ -7796,22 +8002,39 @@
                 <a:ea typeface="Calibri" pitchFamily="34" charset="-122"/>
                 <a:cs typeface="Calibri" pitchFamily="34" charset="-120"/>
               </a:rPr>
-              <a:t>M₂ 固定镜</a:t>
+              <a:t>M₂</a:t>
             </a:r>
             <a:endParaRPr lang="en-US" sz="800" dirty="0"/>
           </a:p>
-        </p:txBody>
-      </p:sp>
-      <p:sp>
-        <p:nvSpPr>
-          <p:cNvPr id="21" name="Shape 18"/>
-          <p:cNvSpPr/>
-          <p:nvPr/>
-        </p:nvSpPr>
-        <p:spPr>
-          <a:xfrm>
-            <a:off x="5303520" y="2880360"/>
-            <a:ext cx="777240" cy="182880"/>
+          <a:p>
+            <a:pPr algn="ctr" indent="0" marL="0">
+              <a:buNone/>
+            </a:pPr>
+            <a:r>
+              <a:rPr lang="en-US" sz="800" dirty="0">
+                <a:solidFill>
+                  <a:srgbClr val="FFFFFF"/>
+                </a:solidFill>
+                <a:latin typeface="Calibri" pitchFamily="34" charset="0"/>
+                <a:ea typeface="Calibri" pitchFamily="34" charset="-122"/>
+                <a:cs typeface="Calibri" pitchFamily="34" charset="-120"/>
+              </a:rPr>
+              <a:t>(定镜)</a:t>
+            </a:r>
+            <a:endParaRPr lang="en-US" sz="800" dirty="0"/>
+          </a:p>
+        </p:txBody>
+      </p:sp>
+      <p:sp>
+        <p:nvSpPr>
+          <p:cNvPr id="22" name="Shape 20"/>
+          <p:cNvSpPr/>
+          <p:nvPr/>
+        </p:nvSpPr>
+        <p:spPr>
+          <a:xfrm>
+            <a:off x="6858000" y="2606040"/>
+            <a:ext cx="182880" cy="228600"/>
           </a:xfrm>
           <a:prstGeom prst="rect">
             <a:avLst/>
@@ -7824,135 +8047,112 @@
       </p:sp>
       <p:sp>
         <p:nvSpPr>
-          <p:cNvPr id="22" name="Text 19"/>
-          <p:cNvSpPr/>
-          <p:nvPr/>
-        </p:nvSpPr>
-        <p:spPr>
-          <a:xfrm>
-            <a:off x="5303520" y="2880360"/>
-            <a:ext cx="777240" cy="182880"/>
-          </a:xfrm>
-          <a:prstGeom prst="rect">
-            <a:avLst/>
-          </a:prstGeom>
-          <a:noFill/>
-          <a:ln/>
-        </p:spPr>
-        <p:txBody>
-          <a:bodyPr wrap="square" lIns="0" tIns="0" rIns="0" bIns="0" rtlCol="0" anchor="ctr"/>
-          <a:lstStyle/>
-          <a:p>
-            <a:pPr algn="ctr" indent="0" marL="0">
-              <a:buNone/>
-            </a:pPr>
-            <a:r>
-              <a:rPr lang="en-US" sz="650" dirty="0">
-                <a:solidFill>
-                  <a:srgbClr val="1E293B"/>
-                </a:solidFill>
-                <a:latin typeface="Calibri" pitchFamily="34" charset="0"/>
-                <a:ea typeface="Calibri" pitchFamily="34" charset="-122"/>
-                <a:cs typeface="Calibri" pitchFamily="34" charset="-120"/>
-              </a:rPr>
-              <a:t>玻璃板 d,n</a:t>
-            </a:r>
-            <a:endParaRPr lang="en-US" sz="650" dirty="0"/>
-          </a:p>
-        </p:txBody>
-      </p:sp>
-      <p:sp>
-        <p:nvSpPr>
-          <p:cNvPr id="23" name="Shape 20"/>
-          <p:cNvSpPr/>
-          <p:nvPr/>
-        </p:nvSpPr>
-        <p:spPr>
-          <a:xfrm>
-            <a:off x="4846320" y="3383280"/>
-            <a:ext cx="640080" cy="274320"/>
+          <p:cNvPr id="23" name="Text 21"/>
+          <p:cNvSpPr/>
+          <p:nvPr/>
+        </p:nvSpPr>
+        <p:spPr>
+          <a:xfrm>
+            <a:off x="6858000" y="2880360"/>
+            <a:ext cx="731520" cy="182880"/>
+          </a:xfrm>
+          <a:prstGeom prst="rect">
+            <a:avLst/>
+          </a:prstGeom>
+          <a:noFill/>
+          <a:ln/>
+        </p:spPr>
+        <p:txBody>
+          <a:bodyPr wrap="square" lIns="0" tIns="0" rIns="0" bIns="0" rtlCol="0" anchor="ctr"/>
+          <a:lstStyle/>
+          <a:p>
+            <a:pPr indent="0" marL="0">
+              <a:buNone/>
+            </a:pPr>
+            <a:r>
+              <a:rPr lang="en-US" sz="800" dirty="0">
+                <a:solidFill>
+                  <a:srgbClr val="D4A017"/>
+                </a:solidFill>
+                <a:latin typeface="Calibri" pitchFamily="34" charset="0"/>
+                <a:ea typeface="Calibri" pitchFamily="34" charset="-122"/>
+                <a:cs typeface="Calibri" pitchFamily="34" charset="-120"/>
+              </a:rPr>
+              <a:t>玻璃片</a:t>
+            </a:r>
+            <a:endParaRPr lang="en-US" sz="800" dirty="0"/>
+          </a:p>
+        </p:txBody>
+      </p:sp>
+      <p:sp>
+        <p:nvSpPr>
+          <p:cNvPr id="24" name="Shape 22"/>
+          <p:cNvSpPr/>
+          <p:nvPr/>
+        </p:nvSpPr>
+        <p:spPr>
+          <a:xfrm>
+            <a:off x="4846320" y="3017520"/>
+            <a:ext cx="73152" cy="640080"/>
           </a:xfrm>
           <a:prstGeom prst="rect">
             <a:avLst/>
           </a:prstGeom>
           <a:solidFill>
-            <a:srgbClr val="8899AA"/>
+            <a:srgbClr val="64748B"/>
           </a:solidFill>
           <a:ln/>
         </p:spPr>
       </p:sp>
       <p:sp>
         <p:nvSpPr>
-          <p:cNvPr id="24" name="Text 21"/>
-          <p:cNvSpPr/>
-          <p:nvPr/>
-        </p:nvSpPr>
-        <p:spPr>
-          <a:xfrm>
-            <a:off x="4846320" y="3383280"/>
-            <a:ext cx="640080" cy="274320"/>
-          </a:xfrm>
-          <a:prstGeom prst="rect">
-            <a:avLst/>
-          </a:prstGeom>
-          <a:noFill/>
-          <a:ln/>
-        </p:spPr>
-        <p:txBody>
-          <a:bodyPr wrap="square" lIns="0" tIns="0" rIns="0" bIns="0" rtlCol="0" anchor="ctr"/>
-          <a:lstStyle/>
-          <a:p>
-            <a:pPr algn="ctr" indent="0" marL="0">
-              <a:buNone/>
-            </a:pPr>
-            <a:r>
-              <a:rPr lang="en-US" sz="700" dirty="0">
-                <a:solidFill>
-                  <a:srgbClr val="FFFFFF"/>
-                </a:solidFill>
-                <a:latin typeface="Calibri" pitchFamily="34" charset="0"/>
-                <a:ea typeface="Calibri" pitchFamily="34" charset="-122"/>
-                <a:cs typeface="Calibri" pitchFamily="34" charset="-120"/>
-              </a:rPr>
-              <a:t>观察屏 E</a:t>
-            </a:r>
-            <a:endParaRPr lang="en-US" sz="700" dirty="0"/>
-          </a:p>
-        </p:txBody>
-      </p:sp>
-      <p:sp>
-        <p:nvSpPr>
-          <p:cNvPr id="25" name="Shape 22"/>
-          <p:cNvSpPr/>
-          <p:nvPr/>
-        </p:nvSpPr>
-        <p:spPr>
-          <a:xfrm>
-            <a:off x="5486400" y="1988820"/>
-            <a:ext cx="91440" cy="0"/>
-          </a:xfrm>
-          <a:prstGeom prst="line">
-            <a:avLst/>
-          </a:prstGeom>
-          <a:noFill/>
-          <a:ln w="19050">
-            <a:solidFill>
-              <a:srgbClr val="1E293B"/>
-            </a:solidFill>
-            <a:prstDash val="solid"/>
-          </a:ln>
-        </p:spPr>
-      </p:sp>
-      <p:sp>
-        <p:nvSpPr>
-          <p:cNvPr id="26" name="Shape 23"/>
-          <p:cNvSpPr/>
-          <p:nvPr/>
-        </p:nvSpPr>
-        <p:spPr>
-          <a:xfrm>
-            <a:off x="5829300" y="2148840"/>
-            <a:ext cx="0" cy="320040"/>
+          <p:cNvPr id="25" name="Text 23"/>
+          <p:cNvSpPr/>
+          <p:nvPr/>
+        </p:nvSpPr>
+        <p:spPr>
+          <a:xfrm>
+            <a:off x="4846320" y="3703320"/>
+            <a:ext cx="640080" cy="182880"/>
+          </a:xfrm>
+          <a:prstGeom prst="rect">
+            <a:avLst/>
+          </a:prstGeom>
+          <a:noFill/>
+          <a:ln/>
+        </p:spPr>
+        <p:txBody>
+          <a:bodyPr wrap="square" lIns="0" tIns="0" rIns="0" bIns="0" rtlCol="0" anchor="ctr"/>
+          <a:lstStyle/>
+          <a:p>
+            <a:pPr indent="0" marL="0">
+              <a:buNone/>
+            </a:pPr>
+            <a:r>
+              <a:rPr lang="en-US" sz="800" dirty="0">
+                <a:solidFill>
+                  <a:srgbClr val="64748B"/>
+                </a:solidFill>
+                <a:latin typeface="Calibri" pitchFamily="34" charset="0"/>
+                <a:ea typeface="Calibri" pitchFamily="34" charset="-122"/>
+                <a:cs typeface="Calibri" pitchFamily="34" charset="-120"/>
+              </a:rPr>
+              <a:t>观察屏</a:t>
+            </a:r>
+            <a:endParaRPr lang="en-US" sz="800" dirty="0"/>
+          </a:p>
+        </p:txBody>
+      </p:sp>
+      <p:sp>
+        <p:nvSpPr>
+          <p:cNvPr id="26" name="Shape 24"/>
+          <p:cNvSpPr/>
+          <p:nvPr/>
+        </p:nvSpPr>
+        <p:spPr>
+          <a:xfrm>
+            <a:off x="5486400" y="1993392"/>
+            <a:ext cx="594360" cy="274320"/>
           </a:xfrm>
           <a:prstGeom prst="line">
             <a:avLst/>
@@ -7962,20 +8162,20 @@
             <a:solidFill>
               <a:srgbClr val="CC2233"/>
             </a:solidFill>
-            <a:prstDash val="dash"/>
+            <a:prstDash val="solid"/>
           </a:ln>
         </p:spPr>
       </p:sp>
       <p:sp>
         <p:nvSpPr>
-          <p:cNvPr id="27" name="Shape 24"/>
-          <p:cNvSpPr/>
-          <p:nvPr/>
-        </p:nvSpPr>
-        <p:spPr>
-          <a:xfrm>
-            <a:off x="5829300" y="2468880"/>
-            <a:ext cx="0" cy="-320040"/>
+          <p:cNvPr id="27" name="Shape 25"/>
+          <p:cNvSpPr/>
+          <p:nvPr/>
+        </p:nvSpPr>
+        <p:spPr>
+          <a:xfrm>
+            <a:off x="5486400" y="1993392"/>
+            <a:ext cx="91440" cy="-731520"/>
           </a:xfrm>
           <a:prstGeom prst="line">
             <a:avLst/>
@@ -7985,112 +8185,20 @@
             <a:solidFill>
               <a:srgbClr val="CC2233"/>
             </a:solidFill>
-            <a:prstDash val="dash"/>
-          </a:ln>
-        </p:spPr>
-      </p:sp>
-      <p:sp>
-        <p:nvSpPr>
-          <p:cNvPr id="28" name="Shape 25"/>
-          <p:cNvSpPr/>
-          <p:nvPr/>
-        </p:nvSpPr>
-        <p:spPr>
-          <a:xfrm>
-            <a:off x="6080760" y="1988820"/>
-            <a:ext cx="137160" cy="0"/>
-          </a:xfrm>
-          <a:prstGeom prst="line">
-            <a:avLst/>
-          </a:prstGeom>
-          <a:noFill/>
-          <a:ln w="19050">
-            <a:solidFill>
-              <a:srgbClr val="2980B9"/>
-            </a:solidFill>
             <a:prstDash val="solid"/>
           </a:ln>
         </p:spPr>
       </p:sp>
       <p:sp>
         <p:nvSpPr>
-          <p:cNvPr id="29" name="Shape 26"/>
-          <p:cNvSpPr/>
-          <p:nvPr/>
-        </p:nvSpPr>
-        <p:spPr>
-          <a:xfrm>
-            <a:off x="6720840" y="1988820"/>
-            <a:ext cx="685800" cy="0"/>
-          </a:xfrm>
-          <a:prstGeom prst="line">
-            <a:avLst/>
-          </a:prstGeom>
-          <a:noFill/>
-          <a:ln w="19050">
-            <a:solidFill>
-              <a:srgbClr val="2980B9"/>
-            </a:solidFill>
-            <a:prstDash val="solid"/>
-          </a:ln>
-        </p:spPr>
-      </p:sp>
-      <p:sp>
-        <p:nvSpPr>
-          <p:cNvPr id="30" name="Shape 27"/>
-          <p:cNvSpPr/>
-          <p:nvPr/>
-        </p:nvSpPr>
-        <p:spPr>
-          <a:xfrm>
-            <a:off x="5829300" y="2148840"/>
-            <a:ext cx="0" cy="822960"/>
-          </a:xfrm>
-          <a:prstGeom prst="line">
-            <a:avLst/>
-          </a:prstGeom>
-          <a:noFill/>
-          <a:ln w="19050">
-            <a:solidFill>
-              <a:srgbClr val="1E293B"/>
-            </a:solidFill>
-            <a:prstDash val="dash"/>
-          </a:ln>
-        </p:spPr>
-      </p:sp>
-      <p:sp>
-        <p:nvSpPr>
-          <p:cNvPr id="31" name="Shape 28"/>
-          <p:cNvSpPr/>
-          <p:nvPr/>
-        </p:nvSpPr>
-        <p:spPr>
-          <a:xfrm>
-            <a:off x="5829300" y="2971800"/>
-            <a:ext cx="-982980" cy="548640"/>
-          </a:xfrm>
-          <a:prstGeom prst="line">
-            <a:avLst/>
-          </a:prstGeom>
-          <a:noFill/>
-          <a:ln w="19050">
-            <a:solidFill>
-              <a:srgbClr val="1E293B"/>
-            </a:solidFill>
-            <a:prstDash val="dash"/>
-          </a:ln>
-        </p:spPr>
-      </p:sp>
-      <p:sp>
-        <p:nvSpPr>
-          <p:cNvPr id="32" name="Text 29"/>
-          <p:cNvSpPr/>
-          <p:nvPr/>
-        </p:nvSpPr>
-        <p:spPr>
-          <a:xfrm>
-            <a:off x="6583680" y="3383280"/>
-            <a:ext cx="1828800" cy="1097280"/>
+          <p:cNvPr id="28" name="Text 26"/>
+          <p:cNvSpPr/>
+          <p:nvPr/>
+        </p:nvSpPr>
+        <p:spPr>
+          <a:xfrm>
+            <a:off x="4892040" y="4023360"/>
+            <a:ext cx="3291840" cy="365760"/>
           </a:xfrm>
           <a:prstGeom prst="rect">
             <a:avLst/>
@@ -8104,88 +8212,28 @@
           <a:p>
             <a:pPr indent="0" marL="0">
               <a:lnSpc>
-                <a:spcPct val="130000"/>
+                <a:spcPct val="120000"/>
               </a:lnSpc>
               <a:buNone/>
             </a:pPr>
             <a:r>
-              <a:rPr lang="en-US" sz="800" b="1" dirty="0">
-                <a:solidFill>
-                  <a:srgbClr val="1B3A5C"/>
-                </a:solidFill>
-                <a:latin typeface="Calibri" pitchFamily="34" charset="0"/>
-                <a:ea typeface="Calibri" pitchFamily="34" charset="-122"/>
-                <a:cs typeface="Calibri" pitchFamily="34" charset="-120"/>
-              </a:rPr>
-              <a:t>半透半反分光板</a:t>
-            </a:r>
-            <a:endParaRPr lang="en-US" sz="800" dirty="0"/>
-          </a:p>
-          <a:p>
-            <a:pPr indent="0" marL="0">
-              <a:lnSpc>
-                <a:spcPct val="130000"/>
-              </a:lnSpc>
-              <a:buNone/>
-            </a:pPr>
-            <a:r>
-              <a:rPr lang="en-US" sz="800" b="1" dirty="0">
-                <a:solidFill>
-                  <a:srgbClr val="1B3A5C"/>
-                </a:solidFill>
-                <a:latin typeface="Calibri" pitchFamily="34" charset="0"/>
-                <a:ea typeface="Calibri" pitchFamily="34" charset="-122"/>
-                <a:cs typeface="Calibri" pitchFamily="34" charset="-120"/>
-              </a:rPr>
-              <a:t>补偿板（同G₁材质厚度）</a:t>
-            </a:r>
-            <a:endParaRPr lang="en-US" sz="800" dirty="0"/>
-          </a:p>
-          <a:p>
-            <a:pPr indent="0" marL="0">
-              <a:lnSpc>
-                <a:spcPct val="130000"/>
-              </a:lnSpc>
-              <a:buNone/>
-            </a:pPr>
-            <a:r>
-              <a:rPr lang="en-US" sz="800" b="1" dirty="0">
-                <a:solidFill>
-                  <a:srgbClr val="CC2233"/>
-                </a:solidFill>
-                <a:latin typeface="Calibri" pitchFamily="34" charset="0"/>
-                <a:ea typeface="Calibri" pitchFamily="34" charset="-122"/>
-                <a:cs typeface="Calibri" pitchFamily="34" charset="-120"/>
-              </a:rPr>
-              <a:t>可沿臂方向移动</a:t>
-            </a:r>
-            <a:endParaRPr lang="en-US" sz="800" dirty="0"/>
-          </a:p>
-          <a:p>
-            <a:pPr indent="0" marL="0">
-              <a:lnSpc>
-                <a:spcPct val="130000"/>
-              </a:lnSpc>
-              <a:buNone/>
-            </a:pPr>
-            <a:r>
-              <a:rPr lang="en-US" sz="800" b="1" dirty="0">
-                <a:solidFill>
-                  <a:srgbClr val="2980B9"/>
-                </a:solidFill>
-                <a:latin typeface="Calibri" pitchFamily="34" charset="0"/>
-                <a:ea typeface="Calibri" pitchFamily="34" charset="-122"/>
-                <a:cs typeface="Calibri" pitchFamily="34" charset="-120"/>
-              </a:rPr>
-              <a:t>位置固定</a:t>
-            </a:r>
-            <a:endParaRPr lang="en-US" sz="800" dirty="0"/>
-          </a:p>
-        </p:txBody>
-      </p:sp>
-      <p:sp>
-        <p:nvSpPr>
-          <p:cNvPr id="33" name="Text 30"/>
+              <a:rPr lang="en-US" sz="1100" b="1" dirty="0">
+                <a:solidFill>
+                  <a:srgbClr val="1E293B"/>
+                </a:solidFill>
+                <a:latin typeface="Calibri" pitchFamily="34" charset="0"/>
+                <a:ea typeface="Calibri" pitchFamily="34" charset="-122"/>
+                <a:cs typeface="Calibri" pitchFamily="34" charset="-120"/>
+              </a:rPr>
+              <a:t>核心测量：一臂插入玻璃片 → 条纹变形 → 移动M1恢复条纹 → 记录Δx → 计算n</a:t>
+            </a:r>
+            <a:endParaRPr lang="en-US" sz="1100" dirty="0"/>
+          </a:p>
+        </p:txBody>
+      </p:sp>
+      <p:sp>
+        <p:nvSpPr>
+          <p:cNvPr id="29" name="Text 27"/>
           <p:cNvSpPr/>
           <p:nvPr/>
         </p:nvSpPr>
@@ -9356,8 +9404,47 @@
         </p:nvSpPr>
         <p:spPr>
           <a:xfrm>
+            <a:off x="7772400" y="3246120"/>
+            <a:ext cx="457200" cy="365760"/>
+          </a:xfrm>
+          <a:prstGeom prst="rect">
+            <a:avLst/>
+          </a:prstGeom>
+          <a:noFill/>
+          <a:ln/>
+        </p:spPr>
+        <p:txBody>
+          <a:bodyPr wrap="square" lIns="0" tIns="0" rIns="0" bIns="0" rtlCol="0" anchor="ctr"/>
+          <a:lstStyle/>
+          <a:p>
+            <a:pPr algn="ctr" indent="0" marL="0">
+              <a:buNone/>
+            </a:pPr>
+            <a:r>
+              <a:rPr lang="en-US" sz="2400" dirty="0">
+                <a:solidFill>
+                  <a:srgbClr val="CC2233"/>
+                </a:solidFill>
+                <a:latin typeface="Segoe UI Symbol" pitchFamily="34" charset="0"/>
+                <a:ea typeface="Segoe UI Symbol" pitchFamily="34" charset="-122"/>
+                <a:cs typeface="Segoe UI Symbol" pitchFamily="34" charset="-120"/>
+              </a:rPr>
+              <a:t>➜</a:t>
+            </a:r>
+            <a:endParaRPr lang="en-US" sz="2400" dirty="0"/>
+          </a:p>
+        </p:txBody>
+      </p:sp>
+      <p:sp>
+        <p:nvSpPr>
+          <p:cNvPr id="32" name="Text 30"/>
+          <p:cNvSpPr/>
+          <p:nvPr/>
+        </p:nvSpPr>
+        <p:spPr>
+          <a:xfrm>
             <a:off x="914400" y="3383280"/>
-            <a:ext cx="7315200" cy="502920"/>
+            <a:ext cx="6858000" cy="502920"/>
           </a:xfrm>
           <a:prstGeom prst="rect">
             <a:avLst/>
@@ -9387,33 +9474,9 @@
           </a:p>
         </p:txBody>
       </p:sp>
-      <p:pic>
-        <p:nvPicPr>
-          <p:cNvPr id="32" name="Image 0" descr="preencoded.png">    </p:cNvPr>
-          <p:cNvPicPr>
-            <a:picLocks noChangeAspect="1"/>
-          </p:cNvPicPr>
-          <p:nvPr/>
-        </p:nvPicPr>
-        <p:blipFill>
-          <a:blip r:embed="rId1"/>
-          <a:stretch>
-            <a:fillRect/>
-          </a:stretch>
-        </p:blipFill>
-        <p:spPr>
-          <a:xfrm>
-            <a:off x="7498080" y="3291840"/>
-            <a:ext cx="320040" cy="320040"/>
-          </a:xfrm>
-          <a:prstGeom prst="rect">
-            <a:avLst/>
-          </a:prstGeom>
-        </p:spPr>
-      </p:pic>
-      <p:sp>
-        <p:nvSpPr>
-          <p:cNvPr id="33" name="Shape 30"/>
+      <p:sp>
+        <p:nvSpPr>
+          <p:cNvPr id="33" name="Shape 31"/>
           <p:cNvSpPr/>
           <p:nvPr/>
         </p:nvSpPr>
@@ -9440,7 +9503,7 @@
       </p:sp>
       <p:sp>
         <p:nvSpPr>
-          <p:cNvPr id="34" name="Text 31"/>
+          <p:cNvPr id="34" name="Text 32"/>
           <p:cNvSpPr/>
           <p:nvPr/>
         </p:nvSpPr>
@@ -9507,7 +9570,7 @@
       </p:sp>
       <p:sp>
         <p:nvSpPr>
-          <p:cNvPr id="35" name="Text 32"/>
+          <p:cNvPr id="35" name="Text 33"/>
           <p:cNvSpPr/>
           <p:nvPr/>
         </p:nvSpPr>
@@ -10678,8 +10741,47 @@
         </p:nvSpPr>
         <p:spPr>
           <a:xfrm>
+            <a:off x="7772400" y="3246120"/>
+            <a:ext cx="457200" cy="365760"/>
+          </a:xfrm>
+          <a:prstGeom prst="rect">
+            <a:avLst/>
+          </a:prstGeom>
+          <a:noFill/>
+          <a:ln/>
+        </p:spPr>
+        <p:txBody>
+          <a:bodyPr wrap="square" lIns="0" tIns="0" rIns="0" bIns="0" rtlCol="0" anchor="ctr"/>
+          <a:lstStyle/>
+          <a:p>
+            <a:pPr algn="ctr" indent="0" marL="0">
+              <a:buNone/>
+            </a:pPr>
+            <a:r>
+              <a:rPr lang="en-US" sz="2400" dirty="0">
+                <a:solidFill>
+                  <a:srgbClr val="D4A017"/>
+                </a:solidFill>
+                <a:latin typeface="Segoe UI Symbol" pitchFamily="34" charset="0"/>
+                <a:ea typeface="Segoe UI Symbol" pitchFamily="34" charset="-122"/>
+                <a:cs typeface="Segoe UI Symbol" pitchFamily="34" charset="-120"/>
+              </a:rPr>
+              <a:t>➜</a:t>
+            </a:r>
+            <a:endParaRPr lang="en-US" sz="2400" dirty="0"/>
+          </a:p>
+        </p:txBody>
+      </p:sp>
+      <p:sp>
+        <p:nvSpPr>
+          <p:cNvPr id="32" name="Text 30"/>
+          <p:cNvSpPr/>
+          <p:nvPr/>
+        </p:nvSpPr>
+        <p:spPr>
+          <a:xfrm>
             <a:off x="914400" y="3383280"/>
-            <a:ext cx="7315200" cy="502920"/>
+            <a:ext cx="6858000" cy="502920"/>
           </a:xfrm>
           <a:prstGeom prst="rect">
             <a:avLst/>
@@ -10709,33 +10811,9 @@
           </a:p>
         </p:txBody>
       </p:sp>
-      <p:pic>
-        <p:nvPicPr>
-          <p:cNvPr id="32" name="Image 0" descr="preencoded.png">    </p:cNvPr>
-          <p:cNvPicPr>
-            <a:picLocks noChangeAspect="1"/>
-          </p:cNvPicPr>
-          <p:nvPr/>
-        </p:nvPicPr>
-        <p:blipFill>
-          <a:blip r:embed="rId1"/>
-          <a:stretch>
-            <a:fillRect/>
-          </a:stretch>
-        </p:blipFill>
-        <p:spPr>
-          <a:xfrm>
-            <a:off x="7498080" y="3291840"/>
-            <a:ext cx="320040" cy="320040"/>
-          </a:xfrm>
-          <a:prstGeom prst="rect">
-            <a:avLst/>
-          </a:prstGeom>
-        </p:spPr>
-      </p:pic>
-      <p:sp>
-        <p:nvSpPr>
-          <p:cNvPr id="33" name="Shape 30"/>
+      <p:sp>
+        <p:nvSpPr>
+          <p:cNvPr id="33" name="Shape 31"/>
           <p:cNvSpPr/>
           <p:nvPr/>
         </p:nvSpPr>
@@ -10762,7 +10840,7 @@
       </p:sp>
       <p:sp>
         <p:nvSpPr>
-          <p:cNvPr id="34" name="Text 31"/>
+          <p:cNvPr id="34" name="Text 32"/>
           <p:cNvSpPr/>
           <p:nvPr/>
         </p:nvSpPr>
@@ -10829,7 +10907,7 @@
       </p:sp>
       <p:sp>
         <p:nvSpPr>
-          <p:cNvPr id="35" name="Text 32"/>
+          <p:cNvPr id="35" name="Text 33"/>
           <p:cNvSpPr/>
           <p:nvPr/>
         </p:nvSpPr>
@@ -11004,33 +11082,70 @@
           </a:effectLst>
         </p:spPr>
       </p:sp>
-      <p:pic>
-        <p:nvPicPr>
-          <p:cNvPr id="6" name="Image 0" descr="preencoded.png">    </p:cNvPr>
-          <p:cNvPicPr>
-            <a:picLocks noChangeAspect="1"/>
-          </p:cNvPicPr>
-          <p:nvPr/>
-        </p:nvPicPr>
-        <p:blipFill>
-          <a:blip r:embed="rId1"/>
-          <a:stretch>
-            <a:fillRect/>
-          </a:stretch>
-        </p:blipFill>
+      <p:sp>
+        <p:nvSpPr>
+          <p:cNvPr id="6" name="Shape 4"/>
+          <p:cNvSpPr/>
+          <p:nvPr/>
+        </p:nvSpPr>
         <p:spPr>
           <a:xfrm>
             <a:off x="914400" y="1417320"/>
             <a:ext cx="365760" cy="365760"/>
           </a:xfrm>
           <a:prstGeom prst="rect">
-            <a:avLst/>
-          </a:prstGeom>
-        </p:spPr>
-      </p:pic>
-      <p:sp>
-        <p:nvSpPr>
-          <p:cNvPr id="7" name="Text 4"/>
+            <a:avLst>
+              <a:gd name="adj" fmla="val 12500"/>
+            </a:avLst>
+          </a:prstGeom>
+          <a:solidFill>
+            <a:srgbClr val="D4A017"/>
+          </a:solidFill>
+          <a:ln/>
+        </p:spPr>
+      </p:sp>
+      <p:sp>
+        <p:nvSpPr>
+          <p:cNvPr id="7" name="Text 5"/>
+          <p:cNvSpPr/>
+          <p:nvPr/>
+        </p:nvSpPr>
+        <p:spPr>
+          <a:xfrm>
+            <a:off x="914400" y="1417320"/>
+            <a:ext cx="365760" cy="365760"/>
+          </a:xfrm>
+          <a:prstGeom prst="rect">
+            <a:avLst/>
+          </a:prstGeom>
+          <a:noFill/>
+          <a:ln/>
+        </p:spPr>
+        <p:txBody>
+          <a:bodyPr wrap="square" lIns="0" tIns="0" rIns="0" bIns="0" rtlCol="0" anchor="ctr"/>
+          <a:lstStyle/>
+          <a:p>
+            <a:pPr algn="ctr" indent="0" marL="0">
+              <a:buNone/>
+            </a:pPr>
+            <a:r>
+              <a:rPr lang="en-US" sz="1120" dirty="0">
+                <a:solidFill>
+                  <a:srgbClr val="FFFFFF"/>
+                </a:solidFill>
+                <a:latin typeface="Segoe UI Symbol" pitchFamily="34" charset="0"/>
+                <a:ea typeface="Segoe UI Symbol" pitchFamily="34" charset="-122"/>
+                <a:cs typeface="Segoe UI Symbol" pitchFamily="34" charset="-120"/>
+              </a:rPr>
+              <a:t>💡</a:t>
+            </a:r>
+            <a:endParaRPr lang="en-US" sz="1120" dirty="0"/>
+          </a:p>
+        </p:txBody>
+      </p:sp>
+      <p:sp>
+        <p:nvSpPr>
+          <p:cNvPr id="8" name="Text 6"/>
           <p:cNvSpPr/>
           <p:nvPr/>
         </p:nvSpPr>
@@ -11069,7 +11184,7 @@
       </p:sp>
       <p:sp>
         <p:nvSpPr>
-          <p:cNvPr id="8" name="Text 5"/>
+          <p:cNvPr id="9" name="Text 7"/>
           <p:cNvSpPr/>
           <p:nvPr/>
         </p:nvSpPr>
@@ -11165,7 +11280,7 @@
       </p:sp>
       <p:sp>
         <p:nvSpPr>
-          <p:cNvPr id="9" name="Shape 6"/>
+          <p:cNvPr id="10" name="Shape 8"/>
           <p:cNvSpPr/>
           <p:nvPr/>
         </p:nvSpPr>
@@ -11192,7 +11307,7 @@
       </p:sp>
       <p:sp>
         <p:nvSpPr>
-          <p:cNvPr id="10" name="Text 7"/>
+          <p:cNvPr id="11" name="Text 9"/>
           <p:cNvSpPr/>
           <p:nvPr/>
         </p:nvSpPr>
@@ -11231,7 +11346,7 @@
       </p:sp>
       <p:sp>
         <p:nvSpPr>
-          <p:cNvPr id="11" name="Shape 8"/>
+          <p:cNvPr id="12" name="Shape 10"/>
           <p:cNvSpPr/>
           <p:nvPr/>
         </p:nvSpPr>
@@ -11251,7 +11366,7 @@
       </p:sp>
       <p:sp>
         <p:nvSpPr>
-          <p:cNvPr id="12" name="Text 9"/>
+          <p:cNvPr id="13" name="Text 11"/>
           <p:cNvSpPr/>
           <p:nvPr/>
         </p:nvSpPr>
@@ -11290,7 +11405,7 @@
       </p:sp>
       <p:sp>
         <p:nvSpPr>
-          <p:cNvPr id="13" name="Shape 10"/>
+          <p:cNvPr id="14" name="Shape 12"/>
           <p:cNvSpPr/>
           <p:nvPr/>
         </p:nvSpPr>
@@ -11310,7 +11425,7 @@
       </p:sp>
       <p:sp>
         <p:nvSpPr>
-          <p:cNvPr id="14" name="Text 11"/>
+          <p:cNvPr id="15" name="Text 13"/>
           <p:cNvSpPr/>
           <p:nvPr/>
         </p:nvSpPr>
@@ -11349,7 +11464,7 @@
       </p:sp>
       <p:sp>
         <p:nvSpPr>
-          <p:cNvPr id="15" name="Text 12"/>
+          <p:cNvPr id="16" name="Text 14"/>
           <p:cNvSpPr/>
           <p:nvPr/>
         </p:nvSpPr>
@@ -11388,7 +11503,7 @@
       </p:sp>
       <p:sp>
         <p:nvSpPr>
-          <p:cNvPr id="16" name="Shape 13"/>
+          <p:cNvPr id="17" name="Shape 15"/>
           <p:cNvSpPr/>
           <p:nvPr/>
         </p:nvSpPr>
@@ -11411,7 +11526,7 @@
       </p:sp>
       <p:sp>
         <p:nvSpPr>
-          <p:cNvPr id="17" name="Shape 14"/>
+          <p:cNvPr id="18" name="Shape 16"/>
           <p:cNvSpPr/>
           <p:nvPr/>
         </p:nvSpPr>
@@ -11431,7 +11546,7 @@
       </p:sp>
       <p:sp>
         <p:nvSpPr>
-          <p:cNvPr id="18" name="Text 15"/>
+          <p:cNvPr id="19" name="Text 17"/>
           <p:cNvSpPr/>
           <p:nvPr/>
         </p:nvSpPr>
@@ -11470,7 +11585,7 @@
       </p:sp>
       <p:sp>
         <p:nvSpPr>
-          <p:cNvPr id="19" name="Text 16"/>
+          <p:cNvPr id="20" name="Text 18"/>
           <p:cNvSpPr/>
           <p:nvPr/>
         </p:nvSpPr>
@@ -11561,7 +11676,7 @@
       </p:sp>
       <p:sp>
         <p:nvSpPr>
-          <p:cNvPr id="20" name="Shape 17"/>
+          <p:cNvPr id="21" name="Shape 19"/>
           <p:cNvSpPr/>
           <p:nvPr/>
         </p:nvSpPr>
@@ -11588,7 +11703,7 @@
       </p:sp>
       <p:sp>
         <p:nvSpPr>
-          <p:cNvPr id="21" name="Text 18"/>
+          <p:cNvPr id="22" name="Text 20"/>
           <p:cNvSpPr/>
           <p:nvPr/>
         </p:nvSpPr>
@@ -11627,7 +11742,7 @@
       </p:sp>
       <p:sp>
         <p:nvSpPr>
-          <p:cNvPr id="22" name="Text 19"/>
+          <p:cNvPr id="23" name="Text 21"/>
           <p:cNvSpPr/>
           <p:nvPr/>
         </p:nvSpPr>
@@ -11698,7 +11813,7 @@
       </p:sp>
       <p:sp>
         <p:nvSpPr>
-          <p:cNvPr id="23" name="Text 20"/>
+          <p:cNvPr id="24" name="Text 22"/>
           <p:cNvSpPr/>
           <p:nvPr/>
         </p:nvSpPr>
@@ -12686,33 +12801,70 @@
           <a:ln/>
         </p:spPr>
       </p:sp>
-      <p:pic>
-        <p:nvPicPr>
-          <p:cNvPr id="12" name="Image 0" descr="preencoded.png">    </p:cNvPr>
-          <p:cNvPicPr>
-            <a:picLocks noChangeAspect="1"/>
-          </p:cNvPicPr>
-          <p:nvPr/>
-        </p:nvPicPr>
-        <p:blipFill>
-          <a:blip r:embed="rId1"/>
-          <a:stretch>
-            <a:fillRect/>
-          </a:stretch>
-        </p:blipFill>
+      <p:sp>
+        <p:nvSpPr>
+          <p:cNvPr id="12" name="Shape 9"/>
+          <p:cNvSpPr/>
+          <p:nvPr/>
+        </p:nvSpPr>
         <p:spPr>
           <a:xfrm>
             <a:off x="914400" y="3429000"/>
             <a:ext cx="320040" cy="320040"/>
           </a:xfrm>
           <a:prstGeom prst="rect">
-            <a:avLst/>
-          </a:prstGeom>
-        </p:spPr>
-      </p:pic>
-      <p:sp>
-        <p:nvSpPr>
-          <p:cNvPr id="13" name="Text 9"/>
+            <a:avLst>
+              <a:gd name="adj" fmla="val 14286"/>
+            </a:avLst>
+          </a:prstGeom>
+          <a:solidFill>
+            <a:srgbClr val="CC2233"/>
+          </a:solidFill>
+          <a:ln/>
+        </p:spPr>
+      </p:sp>
+      <p:sp>
+        <p:nvSpPr>
+          <p:cNvPr id="13" name="Text 10"/>
+          <p:cNvSpPr/>
+          <p:nvPr/>
+        </p:nvSpPr>
+        <p:spPr>
+          <a:xfrm>
+            <a:off x="914400" y="3429000"/>
+            <a:ext cx="320040" cy="320040"/>
+          </a:xfrm>
+          <a:prstGeom prst="rect">
+            <a:avLst/>
+          </a:prstGeom>
+          <a:noFill/>
+          <a:ln/>
+        </p:spPr>
+        <p:txBody>
+          <a:bodyPr wrap="square" lIns="0" tIns="0" rIns="0" bIns="0" rtlCol="0" anchor="ctr"/>
+          <a:lstStyle/>
+          <a:p>
+            <a:pPr algn="ctr" indent="0" marL="0">
+              <a:buNone/>
+            </a:pPr>
+            <a:r>
+              <a:rPr lang="en-US" sz="980" dirty="0">
+                <a:solidFill>
+                  <a:srgbClr val="FFFFFF"/>
+                </a:solidFill>
+                <a:latin typeface="Segoe UI Symbol" pitchFamily="34" charset="0"/>
+                <a:ea typeface="Segoe UI Symbol" pitchFamily="34" charset="-122"/>
+                <a:cs typeface="Segoe UI Symbol" pitchFamily="34" charset="-120"/>
+              </a:rPr>
+              <a:t>💡</a:t>
+            </a:r>
+            <a:endParaRPr lang="en-US" sz="980" dirty="0"/>
+          </a:p>
+        </p:txBody>
+      </p:sp>
+      <p:sp>
+        <p:nvSpPr>
+          <p:cNvPr id="14" name="Text 11"/>
           <p:cNvSpPr/>
           <p:nvPr/>
         </p:nvSpPr>
@@ -12751,7 +12903,7 @@
       </p:sp>
       <p:sp>
         <p:nvSpPr>
-          <p:cNvPr id="14" name="Text 10"/>
+          <p:cNvPr id="15" name="Text 12"/>
           <p:cNvSpPr/>
           <p:nvPr/>
         </p:nvSpPr>
@@ -12822,7 +12974,7 @@
       </p:sp>
       <p:sp>
         <p:nvSpPr>
-          <p:cNvPr id="15" name="Text 11"/>
+          <p:cNvPr id="16" name="Text 13"/>
           <p:cNvSpPr/>
           <p:nvPr/>
         </p:nvSpPr>
@@ -13350,33 +13502,70 @@
           <a:ln/>
         </p:spPr>
       </p:sp>
-      <p:pic>
-        <p:nvPicPr>
-          <p:cNvPr id="12" name="Image 0" descr="preencoded.png">    </p:cNvPr>
-          <p:cNvPicPr>
-            <a:picLocks noChangeAspect="1"/>
-          </p:cNvPicPr>
-          <p:nvPr/>
-        </p:nvPicPr>
-        <p:blipFill>
-          <a:blip r:embed="rId1"/>
-          <a:stretch>
-            <a:fillRect/>
-          </a:stretch>
-        </p:blipFill>
+      <p:sp>
+        <p:nvSpPr>
+          <p:cNvPr id="12" name="Shape 10"/>
+          <p:cNvSpPr/>
+          <p:nvPr/>
+        </p:nvSpPr>
         <p:spPr>
           <a:xfrm>
             <a:off x="914400" y="3703320"/>
             <a:ext cx="320040" cy="320040"/>
           </a:xfrm>
           <a:prstGeom prst="rect">
-            <a:avLst/>
-          </a:prstGeom>
-        </p:spPr>
-      </p:pic>
-      <p:sp>
-        <p:nvSpPr>
-          <p:cNvPr id="13" name="Text 10"/>
+            <a:avLst>
+              <a:gd name="adj" fmla="val 14286"/>
+            </a:avLst>
+          </a:prstGeom>
+          <a:solidFill>
+            <a:srgbClr val="D4A017"/>
+          </a:solidFill>
+          <a:ln/>
+        </p:spPr>
+      </p:sp>
+      <p:sp>
+        <p:nvSpPr>
+          <p:cNvPr id="13" name="Text 11"/>
+          <p:cNvSpPr/>
+          <p:nvPr/>
+        </p:nvSpPr>
+        <p:spPr>
+          <a:xfrm>
+            <a:off x="914400" y="3703320"/>
+            <a:ext cx="320040" cy="320040"/>
+          </a:xfrm>
+          <a:prstGeom prst="rect">
+            <a:avLst/>
+          </a:prstGeom>
+          <a:noFill/>
+          <a:ln/>
+        </p:spPr>
+        <p:txBody>
+          <a:bodyPr wrap="square" lIns="0" tIns="0" rIns="0" bIns="0" rtlCol="0" anchor="ctr"/>
+          <a:lstStyle/>
+          <a:p>
+            <a:pPr algn="ctr" indent="0" marL="0">
+              <a:buNone/>
+            </a:pPr>
+            <a:r>
+              <a:rPr lang="en-US" sz="980" dirty="0">
+                <a:solidFill>
+                  <a:srgbClr val="FFFFFF"/>
+                </a:solidFill>
+                <a:latin typeface="Segoe UI Symbol" pitchFamily="34" charset="0"/>
+                <a:ea typeface="Segoe UI Symbol" pitchFamily="34" charset="-122"/>
+                <a:cs typeface="Segoe UI Symbol" pitchFamily="34" charset="-120"/>
+              </a:rPr>
+              <a:t>💡</a:t>
+            </a:r>
+            <a:endParaRPr lang="en-US" sz="980" dirty="0"/>
+          </a:p>
+        </p:txBody>
+      </p:sp>
+      <p:sp>
+        <p:nvSpPr>
+          <p:cNvPr id="14" name="Text 12"/>
           <p:cNvSpPr/>
           <p:nvPr/>
         </p:nvSpPr>
@@ -13415,7 +13604,7 @@
       </p:sp>
       <p:sp>
         <p:nvSpPr>
-          <p:cNvPr id="14" name="Text 11"/>
+          <p:cNvPr id="15" name="Text 13"/>
           <p:cNvSpPr/>
           <p:nvPr/>
         </p:nvSpPr>
@@ -13457,7 +13646,7 @@
       </p:sp>
       <p:sp>
         <p:nvSpPr>
-          <p:cNvPr id="15" name="Text 12"/>
+          <p:cNvPr id="16" name="Text 14"/>
           <p:cNvSpPr/>
           <p:nvPr/>
         </p:nvSpPr>
